--- a/03-da-v8-explora-kpis-sql/09-SQL.pptx
+++ b/03-da-v8-explora-kpis-sql/09-SQL.pptx
@@ -104,7 +104,7 @@
                 <a:tab algn="l" pos="0"/>
               </a:tabLst>
             </a:pPr>
-            <a:fld id="{236C8690-4F93-4EA4-96C5-91D16C7F99CE}" type="slidenum">
+            <a:fld id="{6E4CAD86-02F4-4480-B959-F04291FEB6FA}" type="slidenum">
               <a:rPr b="0" lang="en" sz="1000" strike="noStrike" u="none">
                 <a:solidFill>
                   <a:schemeClr val="dk2"/>
@@ -114,7 +114,7 @@
                 <a:latin typeface="Arial"/>
                 <a:ea typeface="Arial"/>
               </a:rPr>
-              <a:t>6</a:t>
+              <a:t>&lt;número&gt;</a:t>
             </a:fld>
             <a:endParaRPr b="0" lang="es-MX" sz="1000" strike="noStrike" u="none">
               <a:solidFill>
@@ -820,7 +820,7 @@
                 <a:tab algn="l" pos="0"/>
               </a:tabLst>
             </a:pPr>
-            <a:fld id="{2688B4C9-503B-4343-BC5B-25EA55B72646}" type="slidenum">
+            <a:fld id="{E143959D-5426-4657-BED5-91A789758868}" type="slidenum">
               <a:rPr b="0" lang="en" sz="1000" strike="noStrike" u="none">
                 <a:solidFill>
                   <a:schemeClr val="dk2"/>
@@ -2084,7 +2084,7 @@
                 <a:tab algn="l" pos="0"/>
               </a:tabLst>
             </a:pPr>
-            <a:fld id="{DD827F43-6DE4-4D8F-B450-7C90B06E3FDE}" type="slidenum">
+            <a:fld id="{FF43B42D-DBAF-4EAB-B792-8757CDCC2A69}" type="slidenum">
               <a:rPr b="0" lang="en" sz="1000" strike="noStrike" u="none">
                 <a:solidFill>
                   <a:schemeClr val="dk2"/>
@@ -3896,7 +3896,7 @@
                 <a:tab algn="l" pos="0"/>
               </a:tabLst>
             </a:pPr>
-            <a:fld id="{E3BC6A63-C918-46B6-B4C4-15F04C600B3B}" type="slidenum">
+            <a:fld id="{94E6EA76-777E-4EF3-8C0F-40ECAAFB282D}" type="slidenum">
               <a:rPr b="0" lang="en" sz="1000" strike="noStrike" u="none">
                 <a:solidFill>
                   <a:schemeClr val="dk2"/>
@@ -4005,7 +4005,7 @@
                 <a:tab algn="l" pos="0"/>
               </a:tabLst>
             </a:pPr>
-            <a:fld id="{E22F8C8A-1D8D-42B9-85E0-FD8C4400D3DC}" type="slidenum">
+            <a:fld id="{78224F0F-E7C0-4351-BA58-8BF78DE24BC8}" type="slidenum">
               <a:rPr b="0" lang="en" sz="1000" strike="noStrike" u="none">
                 <a:solidFill>
                   <a:schemeClr val="dk2"/>
@@ -4506,7 +4506,7 @@
                 <a:tab algn="l" pos="0"/>
               </a:tabLst>
             </a:pPr>
-            <a:fld id="{739D512C-0095-4684-8DFA-064E3BD6F457}" type="slidenum">
+            <a:fld id="{507EAA91-13A1-4FBC-8028-A3DDD8770E1D}" type="slidenum">
               <a:rPr b="0" lang="en" sz="1000" strike="noStrike" u="none">
                 <a:solidFill>
                   <a:schemeClr val="dk2"/>
@@ -4948,7 +4948,7 @@
                 <a:tab algn="l" pos="0"/>
               </a:tabLst>
             </a:pPr>
-            <a:fld id="{094B27BD-920A-4B84-925A-F84553D03089}" type="slidenum">
+            <a:fld id="{6149FD56-D8F6-49B7-B79E-B22BCEB829A4}" type="slidenum">
               <a:rPr b="0" lang="en" sz="1000" strike="noStrike" u="none">
                 <a:solidFill>
                   <a:schemeClr val="dk2"/>
@@ -5664,7 +5664,7 @@
                 <a:tab algn="l" pos="0"/>
               </a:tabLst>
             </a:pPr>
-            <a:fld id="{34587D41-0109-4EBC-9126-2AE6F69534FB}" type="slidenum">
+            <a:fld id="{D9600ACF-813D-4D33-9CB5-A0004781FDEB}" type="slidenum">
               <a:rPr b="0" lang="en" sz="1000" strike="noStrike" u="none">
                 <a:solidFill>
                   <a:schemeClr val="dk2"/>
@@ -5832,7 +5832,7 @@
                 <a:tab algn="l" pos="0"/>
               </a:tabLst>
             </a:pPr>
-            <a:fld id="{413E3700-A914-4C46-936D-6BD6CD2ED0E1}" type="slidenum">
+            <a:fld id="{C9C9DE94-FC8B-449B-AD6B-129FE6A35A25}" type="slidenum">
               <a:rPr b="0" lang="en" sz="1000" strike="noStrike" u="none">
                 <a:solidFill>
                   <a:schemeClr val="dk2"/>
@@ -5941,7 +5941,7 @@
                 <a:tab algn="l" pos="0"/>
               </a:tabLst>
             </a:pPr>
-            <a:fld id="{C0F5DF98-45EA-4BC7-B55D-106E0E3E9C33}" type="slidenum">
+            <a:fld id="{4C3157DC-5924-455C-8443-95AC9EC84BAF}" type="slidenum">
               <a:rPr b="0" lang="en" sz="1000" strike="noStrike" u="none">
                 <a:solidFill>
                   <a:schemeClr val="dk2"/>
@@ -6931,7 +6931,7 @@
                 <a:tab algn="l" pos="0"/>
               </a:tabLst>
             </a:pPr>
-            <a:fld id="{5CA4D609-8ED5-4F74-87EC-CC44E0ACE3CD}" type="slidenum">
+            <a:fld id="{C29EFDBB-3C29-40BC-BEC8-B0EC82B9429F}" type="slidenum">
               <a:rPr b="0" lang="en" sz="1000" strike="noStrike" u="none">
                 <a:solidFill>
                   <a:schemeClr val="dk2"/>
@@ -7099,7 +7099,7 @@
                 <a:tab algn="l" pos="0"/>
               </a:tabLst>
             </a:pPr>
-            <a:fld id="{478A3F4C-65ED-488D-8017-BB9CBE93B01F}" type="slidenum">
+            <a:fld id="{F44D2173-FEEF-48DE-9B7E-81BC5F49B940}" type="slidenum">
               <a:rPr b="0" lang="en" sz="1000" strike="noStrike" u="none">
                 <a:solidFill>
                   <a:schemeClr val="dk2"/>
@@ -7109,7 +7109,7 @@
                 <a:latin typeface="Arial"/>
                 <a:ea typeface="Arial"/>
               </a:rPr>
-              <a:t>6</a:t>
+              <a:t>&lt;número&gt;</a:t>
             </a:fld>
             <a:endParaRPr b="0" lang="es-MX" sz="1000" strike="noStrike" u="none">
               <a:solidFill>
@@ -8089,7 +8089,7 @@
                 <a:tab algn="l" pos="0"/>
               </a:tabLst>
             </a:pPr>
-            <a:fld id="{9FA53CF6-1361-485F-A3FE-84EB42C3D0C4}" type="slidenum">
+            <a:fld id="{00DC5C9A-14D3-4E2C-ABE3-121E3AE46D03}" type="slidenum">
               <a:rPr b="0" lang="en" sz="1000" strike="noStrike" u="none">
                 <a:solidFill>
                   <a:schemeClr val="dk2"/>
@@ -9079,7 +9079,7 @@
                 <a:tab algn="l" pos="0"/>
               </a:tabLst>
             </a:pPr>
-            <a:fld id="{CB392ECC-5DE2-4618-A7A3-77EBC47924E5}" type="slidenum">
+            <a:fld id="{3666DCCE-6EB1-4F4C-968B-09A75F4A8C8B}" type="slidenum">
               <a:rPr b="0" lang="en" sz="1000" strike="noStrike" u="none">
                 <a:solidFill>
                   <a:schemeClr val="dk2"/>
@@ -9795,7 +9795,7 @@
                 <a:tab algn="l" pos="0"/>
               </a:tabLst>
             </a:pPr>
-            <a:fld id="{11468F44-2C65-4A84-BA36-F1E8E0EFCB01}" type="slidenum">
+            <a:fld id="{ED29C87C-F095-4E3F-875B-DD0D4799F613}" type="slidenum">
               <a:rPr b="0" lang="en" sz="1000" strike="noStrike" u="none">
                 <a:solidFill>
                   <a:schemeClr val="dk2"/>
@@ -11059,7 +11059,7 @@
                 <a:tab algn="l" pos="0"/>
               </a:tabLst>
             </a:pPr>
-            <a:fld id="{03D8F2CA-7DD0-4FF0-B7DE-AE4E225CC019}" type="slidenum">
+            <a:fld id="{F6B8AA96-1F77-41A3-830C-9E8722F6D8D4}" type="slidenum">
               <a:rPr b="0" lang="en" sz="1000" strike="noStrike" u="none">
                 <a:solidFill>
                   <a:schemeClr val="dk2"/>
@@ -12871,7 +12871,7 @@
                 <a:tab algn="l" pos="0"/>
               </a:tabLst>
             </a:pPr>
-            <a:fld id="{AB238781-947C-40FB-BA09-65BCD95A242A}" type="slidenum">
+            <a:fld id="{5722F892-853F-4E0C-93F9-C08F75C86947}" type="slidenum">
               <a:rPr b="0" lang="en" sz="1000" strike="noStrike" u="none">
                 <a:solidFill>
                   <a:schemeClr val="dk2"/>
@@ -12930,7 +12930,7 @@
         <p:txBody>
           <a:bodyPr/>
           <a:p>
-            <a:fld id="{D2D2B610-7EB2-4257-B2B9-D870FD1E5C19}" type="slidenum">
+            <a:fld id="{550CFD8A-9639-4874-B9C7-1F69DE685F61}" type="slidenum">
               <a:t>&lt;#&gt;</a:t>
             </a:fld>
           </a:p>
@@ -12972,7 +12972,7 @@
         <p:txBody>
           <a:bodyPr/>
           <a:p>
-            <a:fld id="{1AB661F8-7364-4415-8C13-6E6D64B8C6DF}" type="slidenum">
+            <a:fld id="{24073256-E796-4EF1-AA62-D9A712FFFF87}" type="slidenum">
               <a:t>&lt;#&gt;</a:t>
             </a:fld>
           </a:p>
@@ -13397,7 +13397,7 @@
                 <a:tab algn="l" pos="0"/>
               </a:tabLst>
             </a:pPr>
-            <a:fld id="{A634CFEC-DBD6-4EB8-BDE1-BC546DF1AF21}" type="slidenum">
+            <a:fld id="{001BDB3F-50F4-4DFF-8A12-98987198A2E6}" type="slidenum">
               <a:rPr b="0" lang="en" sz="1000" strike="noStrike" u="none">
                 <a:solidFill>
                   <a:schemeClr val="dk2"/>
@@ -14113,7 +14113,7 @@
                 <a:tab algn="l" pos="0"/>
               </a:tabLst>
             </a:pPr>
-            <a:fld id="{24444751-450F-4947-B534-2FB3D4700263}" type="slidenum">
+            <a:fld id="{5595122F-A871-4A22-89D3-AFFBBFC23BA4}" type="slidenum">
               <a:rPr b="0" lang="en" sz="1000" strike="noStrike" u="none">
                 <a:solidFill>
                   <a:schemeClr val="dk2"/>
@@ -14281,7 +14281,7 @@
                 <a:tab algn="l" pos="0"/>
               </a:tabLst>
             </a:pPr>
-            <a:fld id="{5BF40843-D971-4EEB-8A07-691B42826C41}" type="slidenum">
+            <a:fld id="{15D17724-30DC-442B-8194-74952F91F4F0}" type="slidenum">
               <a:rPr b="0" lang="en" sz="1000" strike="noStrike" u="none">
                 <a:solidFill>
                   <a:schemeClr val="dk2"/>
@@ -14390,7 +14390,7 @@
                 <a:tab algn="l" pos="0"/>
               </a:tabLst>
             </a:pPr>
-            <a:fld id="{82AE7FE0-C45C-4BEC-A9B7-340657CB6738}" type="slidenum">
+            <a:fld id="{109F6DAB-7782-4EFA-8D08-84E72478AE3D}" type="slidenum">
               <a:rPr b="0" lang="en" sz="1000" strike="noStrike" u="none">
                 <a:solidFill>
                   <a:schemeClr val="dk2"/>
@@ -15380,7 +15380,7 @@
                 <a:tab algn="l" pos="0"/>
               </a:tabLst>
             </a:pPr>
-            <a:fld id="{00089773-8563-4117-83C3-FFC265FE6947}" type="slidenum">
+            <a:fld id="{2C7DE7FF-8BA1-467C-9246-FD37F12BFB57}" type="slidenum">
               <a:rPr b="0" lang="en" sz="1000" strike="noStrike" u="none">
                 <a:solidFill>
                   <a:schemeClr val="dk2"/>
@@ -16370,7 +16370,7 @@
                 <a:tab algn="l" pos="0"/>
               </a:tabLst>
             </a:pPr>
-            <a:fld id="{71CF54E6-47E0-4E05-A0EA-F9446E1FF18D}" type="slidenum">
+            <a:fld id="{CAB89B2D-6C11-4EA6-B3FE-154042217DEE}" type="slidenum">
               <a:rPr b="0" lang="en" sz="1000" strike="noStrike" u="none">
                 <a:solidFill>
                   <a:schemeClr val="dk2"/>
@@ -17360,7 +17360,7 @@
                 <a:tab algn="l" pos="0"/>
               </a:tabLst>
             </a:pPr>
-            <a:fld id="{83B887BB-12C0-4CBF-9C02-C75EE6D7DB2F}" type="slidenum">
+            <a:fld id="{22718F2D-F53D-4A85-A591-8581E2B63216}" type="slidenum">
               <a:rPr b="0" lang="en" sz="1000" strike="noStrike" u="none">
                 <a:solidFill>
                   <a:schemeClr val="dk2"/>
@@ -17543,7 +17543,7 @@
                 <a:tab algn="l" pos="0"/>
               </a:tabLst>
             </a:pPr>
-            <a:fld id="{51D754B4-2A26-4883-AB02-FEFEB91AB61F}" type="slidenum">
+            <a:fld id="{30F9F2DA-733B-40C0-9164-ACFA7D52DEF4}" type="slidenum">
               <a:rPr b="0" lang="en" sz="1000" strike="noStrike" u="none">
                 <a:solidFill>
                   <a:schemeClr val="dk2"/>
@@ -17962,7 +17962,7 @@
                 <a:tab algn="l" pos="0"/>
               </a:tabLst>
             </a:pPr>
-            <a:fld id="{E3460452-BA7C-4E40-BD19-C677393116AD}" type="slidenum">
+            <a:fld id="{51E64D58-53A0-47CB-A1B1-DA7E66D90CE5}" type="slidenum">
               <a:rPr b="0" lang="en" sz="1000" strike="noStrike" u="none">
                 <a:solidFill>
                   <a:schemeClr val="dk2"/>
@@ -17972,7 +17972,7 @@
                 <a:latin typeface="Arial"/>
                 <a:ea typeface="Arial"/>
               </a:rPr>
-              <a:t>&lt;número&gt;</a:t>
+              <a:t>1</a:t>
             </a:fld>
             <a:endParaRPr b="0" lang="es-MX" sz="1000" strike="noStrike" u="none">
               <a:solidFill>
@@ -18462,7 +18462,7 @@
                 <a:tab algn="l" pos="0"/>
               </a:tabLst>
             </a:pPr>
-            <a:fld id="{72C89C60-643C-483E-AED2-835B56F63EF9}" type="datetime5">
+            <a:fld id="{BD61817D-1923-4D34-8918-CBE66A418BB6}" type="datetime5">
               <a:rPr b="0" lang="en" sz="1200" strike="noStrike" u="none">
                 <a:solidFill>
                   <a:srgbClr val="2a2a2a"/>
@@ -18472,7 +18472,7 @@
                 <a:latin typeface="Inter Medium"/>
                 <a:ea typeface="Inter Medium"/>
               </a:rPr>
-              <a:t>Feb 11, 2026</a:t>
+              <a:t>Feb 12, 2026</a:t>
             </a:fld>
             <a:endParaRPr b="0" lang="es-MX" sz="1200" strike="noStrike" u="none">
               <a:solidFill>
